--- a/问题一流程图.9.19日10am第一版.pptx
+++ b/问题一流程图.9.19日10am第一版.pptx
@@ -3343,7 +3343,7 @@
         <p:spPr>
           <a:xfrm>
             <a:off x="552450" y="228600"/>
-            <a:ext cx="5753100" cy="476250"/>
+            <a:ext cx="8362950" cy="488158"/>
           </a:xfrm>
           <a:prstGeom prst="rect">
             <a:avLst/>
@@ -3370,7 +3370,18 @@
               </a:defRPr>
             </a:pPr>
             <a:r>
-              <a:rPr sz="2100" b="1" i="0">
+              <a:rPr lang="en-US" sz="2100" b="1" i="0" dirty="0">
+                <a:solidFill>
+                  <a:srgbClr val="243746"/>
+                </a:solidFill>
+                <a:latin typeface="SimSun"/>
+                <a:ea typeface="SimSun"/>
+                <a:cs typeface="SimSun"/>
+              </a:rPr>
+              <a:t>                      </a:t>
+            </a:r>
+            <a:r>
+              <a:rPr sz="2100" b="1" i="0" dirty="0" err="1">
                 <a:solidFill>
                   <a:srgbClr val="243746"/>
                 </a:solidFill>
@@ -3380,6 +3391,14 @@
               </a:rPr>
               <a:t>问题一：参数拟合与速率预测流程</a:t>
             </a:r>
+            <a:endParaRPr sz="2100" b="1" i="0" dirty="0">
+              <a:solidFill>
+                <a:srgbClr val="243746"/>
+              </a:solidFill>
+              <a:latin typeface="SimSun"/>
+              <a:ea typeface="SimSun"/>
+              <a:cs typeface="SimSun"/>
+            </a:endParaRPr>
           </a:p>
         </p:txBody>
       </p:sp>
@@ -3769,40 +3788,7 @@
                           <a:ea typeface="Latin Modern Roman"/>
                           <a:cs typeface="Latin Modern Roman"/>
                         </a:rPr>
-                        <m:t>⁽</m:t>
-                      </m:r>
-                      <m:r>
-                        <a:rPr lang="en-US" sz="1425" b="0" i="1" dirty="0" err="1">
-                          <a:solidFill>
-                            <a:srgbClr val="243746"/>
-                          </a:solidFill>
-                          <a:latin typeface="Cambria Math" panose="02040503050406030204" pitchFamily="18" charset="0"/>
-                          <a:ea typeface="Latin Modern Roman"/>
-                          <a:cs typeface="Latin Modern Roman"/>
-                        </a:rPr>
-                        <m:t>ʲ</m:t>
-                      </m:r>
-                      <m:r>
-                        <a:rPr lang="en-US" sz="1425" b="0" i="1" dirty="0">
-                          <a:solidFill>
-                            <a:srgbClr val="243746"/>
-                          </a:solidFill>
-                          <a:latin typeface="Cambria Math" panose="02040503050406030204" pitchFamily="18" charset="0"/>
-                          <a:ea typeface="Latin Modern Roman"/>
-                          <a:cs typeface="Latin Modern Roman"/>
-                        </a:rPr>
-                        <m:t>⁾</m:t>
-                      </m:r>
-                      <m:r>
-                        <a:rPr lang="en-US" sz="1425" b="0" i="1" dirty="0">
-                          <a:solidFill>
-                            <a:srgbClr val="243746"/>
-                          </a:solidFill>
-                          <a:latin typeface="Cambria Math" panose="02040503050406030204" pitchFamily="18" charset="0"/>
-                          <a:ea typeface="Latin Modern Roman"/>
-                          <a:cs typeface="Latin Modern Roman"/>
-                        </a:rPr>
-                        <m:t>, </m:t>
+                        <m:t>⁽ʲ⁾, </m:t>
                       </m:r>
                       <m:r>
                         <a:rPr lang="en-US" sz="1425" b="0" i="1" dirty="0">
@@ -3824,51 +3810,7 @@
                           <a:ea typeface="Latin Modern Roman"/>
                           <a:cs typeface="Latin Modern Roman"/>
                         </a:rPr>
-                        <m:t>ₙ</m:t>
-                      </m:r>
-                      <m:r>
-                        <a:rPr lang="en-US" sz="1425" b="0" i="1" dirty="0">
-                          <a:solidFill>
-                            <a:srgbClr val="243746"/>
-                          </a:solidFill>
-                          <a:latin typeface="Cambria Math" panose="02040503050406030204" pitchFamily="18" charset="0"/>
-                          <a:ea typeface="Latin Modern Roman"/>
-                          <a:cs typeface="Latin Modern Roman"/>
-                        </a:rPr>
-                        <m:t>⁽</m:t>
-                      </m:r>
-                      <m:r>
-                        <a:rPr lang="en-US" sz="1425" b="0" i="1" dirty="0">
-                          <a:solidFill>
-                            <a:srgbClr val="243746"/>
-                          </a:solidFill>
-                          <a:latin typeface="Cambria Math" panose="02040503050406030204" pitchFamily="18" charset="0"/>
-                          <a:ea typeface="Latin Modern Roman"/>
-                          <a:cs typeface="Latin Modern Roman"/>
-                        </a:rPr>
-                        <m:t>ʲ</m:t>
-                      </m:r>
-                      <m:r>
-                        <a:rPr lang="en-US" sz="1425" b="0" i="1" dirty="0">
-                          <a:solidFill>
-                            <a:srgbClr val="243746"/>
-                          </a:solidFill>
-                          <a:latin typeface="Cambria Math" panose="02040503050406030204" pitchFamily="18" charset="0"/>
-                          <a:ea typeface="Latin Modern Roman"/>
-                          <a:cs typeface="Latin Modern Roman"/>
-                        </a:rPr>
-                        <m:t>⁾</m:t>
-                      </m:r>
-                      <m:r>
-                        <a:rPr lang="en-US" sz="1425" b="0" i="1" dirty="0">
-                          <a:solidFill>
-                            <a:srgbClr val="243746"/>
-                          </a:solidFill>
-                          <a:latin typeface="Cambria Math" panose="02040503050406030204" pitchFamily="18" charset="0"/>
-                          <a:ea typeface="Latin Modern Roman"/>
-                          <a:cs typeface="Latin Modern Roman"/>
-                        </a:rPr>
-                        <m:t>, </m:t>
+                        <m:t>ₙ⁽ʲ⁾, </m:t>
                       </m:r>
                       <m:r>
                         <a:rPr lang="en-US" sz="1425" b="0" i="1" dirty="0">
@@ -3890,7 +3832,18 @@
                           <a:ea typeface="Latin Modern Roman"/>
                           <a:cs typeface="Latin Modern Roman"/>
                         </a:rPr>
-                        <m:t>ⱼ}</m:t>
+                        <m:t>ⱼ</m:t>
+                      </m:r>
+                      <m:r>
+                        <a:rPr lang="en-US" sz="1425" b="0" i="1" dirty="0">
+                          <a:solidFill>
+                            <a:srgbClr val="243746"/>
+                          </a:solidFill>
+                          <a:latin typeface="Cambria Math" panose="02040503050406030204" pitchFamily="18" charset="0"/>
+                          <a:ea typeface="Latin Modern Roman"/>
+                          <a:cs typeface="Latin Modern Roman"/>
+                        </a:rPr>
+                        <m:t>}</m:t>
                       </m:r>
                     </m:oMath>
                   </m:oMathPara>
@@ -4190,7 +4143,18 @@
                           <a:ea typeface="Latin Modern Roman"/>
                           <a:cs typeface="Latin Modern Roman"/>
                         </a:rPr>
-                        <m:t>ⱼ,ₖ = ‖</m:t>
+                        <m:t>ⱼ</m:t>
+                      </m:r>
+                      <m:r>
+                        <a:rPr lang="en-US" sz="1350" b="0" i="1" dirty="0" smtClean="0">
+                          <a:solidFill>
+                            <a:srgbClr val="243746"/>
+                          </a:solidFill>
+                          <a:latin typeface="Cambria Math" panose="02040503050406030204" pitchFamily="18" charset="0"/>
+                          <a:ea typeface="Latin Modern Roman"/>
+                          <a:cs typeface="Latin Modern Roman"/>
+                        </a:rPr>
+                        <m:t>,ₖ = ‖</m:t>
                       </m:r>
                       <m:r>
                         <a:rPr lang="en-US" sz="1350" b="0" i="1" dirty="0" smtClean="0">
@@ -4212,73 +4176,7 @@
                           <a:ea typeface="Latin Modern Roman"/>
                           <a:cs typeface="Latin Modern Roman"/>
                         </a:rPr>
-                        <m:t>ₖ</m:t>
-                      </m:r>
-                      <m:r>
-                        <a:rPr lang="en-US" sz="1350" b="0" i="1" dirty="0" smtClean="0">
-                          <a:solidFill>
-                            <a:srgbClr val="243746"/>
-                          </a:solidFill>
-                          <a:latin typeface="Cambria Math" panose="02040503050406030204" pitchFamily="18" charset="0"/>
-                          <a:ea typeface="Latin Modern Roman"/>
-                          <a:cs typeface="Latin Modern Roman"/>
-                        </a:rPr>
-                        <m:t>⁽</m:t>
-                      </m:r>
-                      <m:r>
-                        <a:rPr lang="en-US" sz="1350" b="0" i="1" dirty="0" smtClean="0">
-                          <a:solidFill>
-                            <a:srgbClr val="243746"/>
-                          </a:solidFill>
-                          <a:latin typeface="Cambria Math" panose="02040503050406030204" pitchFamily="18" charset="0"/>
-                          <a:ea typeface="Latin Modern Roman"/>
-                          <a:cs typeface="Latin Modern Roman"/>
-                        </a:rPr>
-                        <m:t>ʲ</m:t>
-                      </m:r>
-                      <m:r>
-                        <a:rPr lang="en-US" sz="1350" b="0" i="1" dirty="0" smtClean="0">
-                          <a:solidFill>
-                            <a:srgbClr val="243746"/>
-                          </a:solidFill>
-                          <a:latin typeface="Cambria Math" panose="02040503050406030204" pitchFamily="18" charset="0"/>
-                          <a:ea typeface="Latin Modern Roman"/>
-                          <a:cs typeface="Latin Modern Roman"/>
-                        </a:rPr>
-                        <m:t>⁾</m:t>
-                      </m:r>
-                      <m:r>
-                        <a:rPr lang="en-US" sz="1350" b="0" i="1" dirty="0" smtClean="0">
-                          <a:solidFill>
-                            <a:srgbClr val="243746"/>
-                          </a:solidFill>
-                          <a:latin typeface="Cambria Math" panose="02040503050406030204" pitchFamily="18" charset="0"/>
-                          <a:ea typeface="Latin Modern Roman"/>
-                          <a:cs typeface="Latin Modern Roman"/>
-                        </a:rPr>
-                        <m:t>‖</m:t>
-                      </m:r>
-                      <m:r>
-                        <a:rPr lang="en-US" sz="1350" b="0" i="1" dirty="0" smtClean="0">
-                          <a:solidFill>
-                            <a:srgbClr val="243746"/>
-                          </a:solidFill>
-                          <a:latin typeface="Cambria Math" panose="02040503050406030204" pitchFamily="18" charset="0"/>
-                          <a:ea typeface="Latin Modern Roman"/>
-                          <a:cs typeface="Latin Modern Roman"/>
-                        </a:rPr>
-                        <m:t>²</m:t>
-                      </m:r>
-                      <m:r>
-                        <a:rPr lang="en-US" sz="1350" b="0" i="1" dirty="0" smtClean="0">
-                          <a:solidFill>
-                            <a:srgbClr val="243746"/>
-                          </a:solidFill>
-                          <a:latin typeface="Cambria Math" panose="02040503050406030204" pitchFamily="18" charset="0"/>
-                          <a:ea typeface="Latin Modern Roman"/>
-                          <a:cs typeface="Latin Modern Roman"/>
-                        </a:rPr>
-                        <m:t>_</m:t>
+                        <m:t>ₖ⁽ʲ⁾‖²_</m:t>
                       </m:r>
                       <m:r>
                         <a:rPr lang="en-US" sz="1350" b="0" i="1" dirty="0" smtClean="0">
@@ -4322,40 +4220,7 @@
                           <a:ea typeface="Latin Modern Roman"/>
                           <a:cs typeface="Latin Modern Roman"/>
                         </a:rPr>
-                        <m:t>ₙ</m:t>
-                      </m:r>
-                      <m:r>
-                        <a:rPr lang="en-US" sz="1350" b="0" i="1" dirty="0" smtClean="0">
-                          <a:solidFill>
-                            <a:srgbClr val="243746"/>
-                          </a:solidFill>
-                          <a:latin typeface="Cambria Math" panose="02040503050406030204" pitchFamily="18" charset="0"/>
-                          <a:ea typeface="Latin Modern Roman"/>
-                          <a:cs typeface="Latin Modern Roman"/>
-                        </a:rPr>
-                        <m:t>⁽</m:t>
-                      </m:r>
-                      <m:r>
-                        <a:rPr lang="en-US" sz="1350" b="0" i="1" dirty="0" smtClean="0">
-                          <a:solidFill>
-                            <a:srgbClr val="243746"/>
-                          </a:solidFill>
-                          <a:latin typeface="Cambria Math" panose="02040503050406030204" pitchFamily="18" charset="0"/>
-                          <a:ea typeface="Latin Modern Roman"/>
-                          <a:cs typeface="Latin Modern Roman"/>
-                        </a:rPr>
-                        <m:t>ʲ</m:t>
-                      </m:r>
-                      <m:r>
-                        <a:rPr lang="en-US" sz="1350" b="0" i="1" dirty="0" smtClean="0">
-                          <a:solidFill>
-                            <a:srgbClr val="243746"/>
-                          </a:solidFill>
-                          <a:latin typeface="Cambria Math" panose="02040503050406030204" pitchFamily="18" charset="0"/>
-                          <a:ea typeface="Latin Modern Roman"/>
-                          <a:cs typeface="Latin Modern Roman"/>
-                        </a:rPr>
-                        <m:t>⁾</m:t>
+                        <m:t>ₙ⁽ʲ⁾</m:t>
                       </m:r>
                       <m:r>
                         <a:rPr lang="en-US" sz="1350" b="0" i="1" dirty="0" smtClean="0">
@@ -4388,40 +4253,7 @@
                           <a:ea typeface="Latin Modern Roman"/>
                           <a:cs typeface="Latin Modern Roman"/>
                         </a:rPr>
-                        <m:t> = </m:t>
-                      </m:r>
-                      <m:r>
-                        <a:rPr lang="en-US" sz="1350" b="0" i="1" dirty="0" smtClean="0">
-                          <a:solidFill>
-                            <a:srgbClr val="243746"/>
-                          </a:solidFill>
-                          <a:latin typeface="Cambria Math" panose="02040503050406030204" pitchFamily="18" charset="0"/>
-                          <a:ea typeface="Latin Modern Roman"/>
-                          <a:cs typeface="Latin Modern Roman"/>
-                        </a:rPr>
-                        <m:t>1</m:t>
-                      </m:r>
-                      <m:r>
-                        <a:rPr lang="en-US" sz="1350" b="0" i="1" dirty="0" smtClean="0">
-                          <a:solidFill>
-                            <a:srgbClr val="243746"/>
-                          </a:solidFill>
-                          <a:latin typeface="Cambria Math" panose="02040503050406030204" pitchFamily="18" charset="0"/>
-                          <a:ea typeface="Latin Modern Roman"/>
-                          <a:cs typeface="Latin Modern Roman"/>
-                        </a:rPr>
-                        <m:t>,…,</m:t>
-                      </m:r>
-                      <m:r>
-                        <a:rPr lang="en-US" sz="1350" b="0" i="1" dirty="0" smtClean="0">
-                          <a:solidFill>
-                            <a:srgbClr val="243746"/>
-                          </a:solidFill>
-                          <a:latin typeface="Cambria Math" panose="02040503050406030204" pitchFamily="18" charset="0"/>
-                          <a:ea typeface="Latin Modern Roman"/>
-                          <a:cs typeface="Latin Modern Roman"/>
-                        </a:rPr>
-                        <m:t>122</m:t>
+                        <m:t> = 1,…,122</m:t>
                       </m:r>
                     </m:oMath>
                   </m:oMathPara>
@@ -5631,7 +5463,18 @@
                           <a:ea typeface="Latin Modern Roman"/>
                           <a:cs typeface="Latin Modern Roman"/>
                         </a:rPr>
-                        <m:t>ⱼ(</m:t>
+                        <m:t>ⱼ</m:t>
+                      </m:r>
+                      <m:r>
+                        <a:rPr lang="en-US" altLang="zh-CN" i="1" dirty="0" smtClean="0">
+                          <a:solidFill>
+                            <a:srgbClr val="243746"/>
+                          </a:solidFill>
+                          <a:latin typeface="Cambria Math" panose="02040503050406030204" pitchFamily="18" charset="0"/>
+                          <a:ea typeface="Latin Modern Roman"/>
+                          <a:cs typeface="Latin Modern Roman"/>
+                        </a:rPr>
+                        <m:t>(</m:t>
                       </m:r>
                       <m:r>
                         <a:rPr lang="el-GR" altLang="zh-CN" i="1" dirty="0" smtClean="0">
@@ -5722,84 +5565,7 @@
                           <a:ea typeface="Latin Modern Roman"/>
                           <a:cs typeface="Latin Modern Roman"/>
                         </a:rPr>
-                        <m:t>⁡[(</m:t>
-                      </m:r>
-                      <m:r>
-                        <a:rPr lang="en-US" altLang="zh-CN" i="1" dirty="0" smtClean="0">
-                          <a:solidFill>
-                            <a:srgbClr val="243746"/>
-                          </a:solidFill>
-                          <a:latin typeface="Cambria Math" panose="02040503050406030204" pitchFamily="18" charset="0"/>
-                          <a:ea typeface="Latin Modern Roman"/>
-                          <a:cs typeface="Latin Modern Roman"/>
-                        </a:rPr>
-                        <m:t>1</m:t>
-                      </m:r>
-                      <m:r>
-                        <a:rPr lang="en-US" altLang="zh-CN" i="1" dirty="0" smtClean="0">
-                          <a:solidFill>
-                            <a:srgbClr val="243746"/>
-                          </a:solidFill>
-                          <a:latin typeface="Cambria Math" panose="02040503050406030204" pitchFamily="18" charset="0"/>
-                          <a:ea typeface="Latin Modern Roman"/>
-                          <a:cs typeface="Latin Modern Roman"/>
-                        </a:rPr>
-                        <m:t>/</m:t>
-                      </m:r>
-                      <m:r>
-                        <a:rPr lang="en-US" altLang="zh-CN" i="1" dirty="0" smtClean="0">
-                          <a:solidFill>
-                            <a:srgbClr val="243746"/>
-                          </a:solidFill>
-                          <a:latin typeface="Cambria Math" panose="02040503050406030204" pitchFamily="18" charset="0"/>
-                          <a:ea typeface="Latin Modern Roman"/>
-                          <a:cs typeface="Latin Modern Roman"/>
-                        </a:rPr>
-                        <m:t>122</m:t>
-                      </m:r>
-                      <m:r>
-                        <a:rPr lang="en-US" altLang="zh-CN" i="1" dirty="0" smtClean="0">
-                          <a:solidFill>
-                            <a:srgbClr val="243746"/>
-                          </a:solidFill>
-                          <a:latin typeface="Cambria Math" panose="02040503050406030204" pitchFamily="18" charset="0"/>
-                          <a:ea typeface="Latin Modern Roman"/>
-                          <a:cs typeface="Latin Modern Roman"/>
-                        </a:rPr>
-                        <m:t>) ∑ₖ</m:t>
-                      </m:r>
-                      <m:r>
-                        <a:rPr lang="en-US" altLang="zh-CN" i="1" dirty="0" smtClean="0">
-                          <a:solidFill>
-                            <a:srgbClr val="243746"/>
-                          </a:solidFill>
-                          <a:latin typeface="Cambria Math" panose="02040503050406030204" pitchFamily="18" charset="0"/>
-                          <a:ea typeface="Latin Modern Roman"/>
-                          <a:cs typeface="Latin Modern Roman"/>
-                        </a:rPr>
-                        <m:t>₌</m:t>
-                      </m:r>
-                      <m:r>
-                        <a:rPr lang="en-US" altLang="zh-CN" i="1" dirty="0" smtClean="0">
-                          <a:solidFill>
-                            <a:srgbClr val="243746"/>
-                          </a:solidFill>
-                          <a:latin typeface="Cambria Math" panose="02040503050406030204" pitchFamily="18" charset="0"/>
-                          <a:ea typeface="Latin Modern Roman"/>
-                          <a:cs typeface="Latin Modern Roman"/>
-                        </a:rPr>
-                        <m:t>₁¹²²</m:t>
-                      </m:r>
-                      <m:r>
-                        <a:rPr lang="en-US" altLang="zh-CN" i="1" dirty="0" smtClean="0">
-                          <a:solidFill>
-                            <a:srgbClr val="243746"/>
-                          </a:solidFill>
-                          <a:latin typeface="Cambria Math" panose="02040503050406030204" pitchFamily="18" charset="0"/>
-                          <a:ea typeface="Latin Modern Roman"/>
-                          <a:cs typeface="Latin Modern Roman"/>
-                        </a:rPr>
-                        <m:t> </m:t>
+                        <m:t>⁡[(1/122) ∑ₖ₌₁¹²² </m:t>
                       </m:r>
                       <m:r>
                         <m:rPr>
@@ -5846,7 +5612,18 @@
                           <a:ea typeface="Latin Modern Roman"/>
                           <a:cs typeface="Latin Modern Roman"/>
                         </a:rPr>
-                        <m:t>ⱼ,ₖ/</m:t>
+                        <m:t>ⱼ</m:t>
+                      </m:r>
+                      <m:r>
+                        <a:rPr lang="en-US" altLang="zh-CN" i="1" dirty="0" smtClean="0">
+                          <a:solidFill>
+                            <a:srgbClr val="243746"/>
+                          </a:solidFill>
+                          <a:latin typeface="Cambria Math" panose="02040503050406030204" pitchFamily="18" charset="0"/>
+                          <a:ea typeface="Latin Modern Roman"/>
+                          <a:cs typeface="Latin Modern Roman"/>
+                        </a:rPr>
+                        <m:t>,ₖ/</m:t>
                       </m:r>
                       <m:r>
                         <a:rPr lang="el-GR" altLang="zh-CN" i="1" dirty="0" smtClean="0">
@@ -6201,7 +5978,18 @@
                         <a:ea typeface="Latin Modern Roman"/>
                         <a:cs typeface="Latin Modern Roman"/>
                       </a:rPr>
-                      <m:t>ⱼ ∈ {</m:t>
+                      <m:t>ⱼ</m:t>
+                    </m:r>
+                    <m:r>
+                      <a:rPr lang="en-US" altLang="zh-CN" sz="1500" i="1" dirty="0" smtClean="0">
+                        <a:solidFill>
+                          <a:srgbClr val="243746"/>
+                        </a:solidFill>
+                        <a:latin typeface="Cambria Math" panose="02040503050406030204" pitchFamily="18" charset="0"/>
+                        <a:ea typeface="Latin Modern Roman"/>
+                        <a:cs typeface="Latin Modern Roman"/>
+                      </a:rPr>
+                      <m:t> ∈ {</m:t>
                     </m:r>
                     <m:r>
                       <a:rPr lang="en-US" altLang="zh-CN" sz="1500" i="1" dirty="0">
@@ -6223,18 +6011,7 @@
                         <a:ea typeface="Latin Modern Roman"/>
                         <a:cs typeface="Latin Modern Roman"/>
                       </a:rPr>
-                      <m:t>₀</m:t>
-                    </m:r>
-                    <m:r>
-                      <a:rPr lang="en-US" altLang="zh-CN" sz="1500" i="1" dirty="0">
-                        <a:solidFill>
-                          <a:srgbClr val="243746"/>
-                        </a:solidFill>
-                        <a:latin typeface="Cambria Math" panose="02040503050406030204" pitchFamily="18" charset="0"/>
-                        <a:ea typeface="Latin Modern Roman"/>
-                        <a:cs typeface="Latin Modern Roman"/>
-                      </a:rPr>
-                      <m:t>, </m:t>
+                      <m:t>₀, </m:t>
                     </m:r>
                     <m:r>
                       <a:rPr lang="en-US" altLang="zh-CN" sz="1500" i="1" dirty="0">
@@ -6256,18 +6033,7 @@
                         <a:ea typeface="Latin Modern Roman"/>
                         <a:cs typeface="Latin Modern Roman"/>
                       </a:rPr>
-                      <m:t>₁</m:t>
-                    </m:r>
-                    <m:r>
-                      <a:rPr lang="en-US" altLang="zh-CN" sz="1500" i="1" dirty="0">
-                        <a:solidFill>
-                          <a:srgbClr val="243746"/>
-                        </a:solidFill>
-                        <a:latin typeface="Cambria Math" panose="02040503050406030204" pitchFamily="18" charset="0"/>
-                        <a:ea typeface="Latin Modern Roman"/>
-                        <a:cs typeface="Latin Modern Roman"/>
-                      </a:rPr>
-                      <m:t>, …, </m:t>
+                      <m:t>₁, …, </m:t>
                     </m:r>
                     <m:r>
                       <a:rPr lang="en-US" altLang="zh-CN" sz="1500" i="1" dirty="0" err="1">
@@ -6719,10 +6485,10 @@
                         <a:ea typeface="Latin Modern Roman"/>
                         <a:cs typeface="Latin Modern Roman"/>
                       </a:rPr>
-                      <m:t>ŷⱼ </m:t>
+                      <m:t>ŷ</m:t>
                     </m:r>
                     <m:r>
-                      <a:rPr lang="cy-GB" altLang="zh-CN" i="1" dirty="0">
+                      <a:rPr lang="cy-GB" altLang="zh-CN" i="1" dirty="0" smtClean="0">
                         <a:solidFill>
                           <a:srgbClr val="243746"/>
                         </a:solidFill>
@@ -6730,7 +6496,18 @@
                         <a:ea typeface="Latin Modern Roman"/>
                         <a:cs typeface="Latin Modern Roman"/>
                       </a:rPr>
-                      <m:t>= </m:t>
+                      <m:t>ⱼ</m:t>
+                    </m:r>
+                    <m:r>
+                      <a:rPr lang="cy-GB" altLang="zh-CN" i="1" dirty="0" smtClean="0">
+                        <a:solidFill>
+                          <a:srgbClr val="243746"/>
+                        </a:solidFill>
+                        <a:latin typeface="Cambria Math" panose="02040503050406030204" pitchFamily="18" charset="0"/>
+                        <a:ea typeface="Latin Modern Roman"/>
+                        <a:cs typeface="Latin Modern Roman"/>
+                      </a:rPr>
+                      <m:t> = </m:t>
                     </m:r>
                     <m:r>
                       <a:rPr lang="cy-GB" altLang="zh-CN" i="1" dirty="0">
@@ -6807,7 +6584,18 @@
                         <a:ea typeface="Latin Modern Roman"/>
                         <a:cs typeface="Latin Modern Roman"/>
                       </a:rPr>
-                      <m:t>ⱼ(</m:t>
+                      <m:t>ⱼ</m:t>
+                    </m:r>
+                    <m:r>
+                      <a:rPr lang="cy-GB" altLang="zh-CN" i="1" dirty="0">
+                        <a:solidFill>
+                          <a:srgbClr val="243746"/>
+                        </a:solidFill>
+                        <a:latin typeface="Cambria Math" panose="02040503050406030204" pitchFamily="18" charset="0"/>
+                        <a:ea typeface="Latin Modern Roman"/>
+                        <a:cs typeface="Latin Modern Roman"/>
+                      </a:rPr>
+                      <m:t>(</m:t>
                     </m:r>
                     <m:r>
                       <a:rPr lang="cy-GB" altLang="zh-CN" i="1" dirty="0">
